--- a/docs/exports/Oct13_session2.pptx
+++ b/docs/exports/Oct13_session2.pptx
@@ -37,6 +37,7 @@
     <p:sldId id="285" r:id="rId37"/>
     <p:sldId id="286" r:id="rId38"/>
     <p:sldId id="287" r:id="rId39"/>
+    <p:sldId id="288" r:id="rId40"/>
   </p:sldIdLst>
   <p:sldSz cx="12192000" cy="6858000" type="screen4x3"/>
   <p:notesSz cx="6858000" cy="9144000"/>
@@ -654,7 +655,7 @@
           <a:lstStyle/>
           <a:p>
             <a:r>
-              <a:t>Optional. If time is short, skip to the next slide. If you run it, ask what the AI missed, what it added that is worth keeping, and whether anything was wrong.</a:t>
+              <a:t>Paper (Oct13_session2_materials.docx): Hand out the AI handout (pack page 6, one per group).</a:t>
             </a:r>
           </a:p>
           <a:p/>
@@ -775,6 +776,127 @@
           <a:lstStyle/>
           <a:p>
             <a:r>
+              <a:t>Optional. If time is short, skip to the next slide. If you run it, ask what the AI missed, what it added that is worth keeping, and whether anything was wrong.</a:t>
+            </a:r>
+          </a:p>
+          <a:p/>
+          <a:p>
+            <a:r>
+              <a:t>span.MJX_Assistive_MathML {</a:t>
+            </a:r>
+          </a:p>
+          <a:p>
+            <a:r>
+              <a:t>position:absolute!important;</a:t>
+            </a:r>
+          </a:p>
+          <a:p>
+            <a:r>
+              <a:t>clip: rect(1px, 1px, 1px, 1px);</a:t>
+            </a:r>
+          </a:p>
+          <a:p>
+            <a:r>
+              <a:t>padding: 1px 0 0 0!important;</a:t>
+            </a:r>
+          </a:p>
+          <a:p>
+            <a:r>
+              <a:t>border: 0!important;</a:t>
+            </a:r>
+          </a:p>
+          <a:p>
+            <a:r>
+              <a:t>height: 1px!important;</a:t>
+            </a:r>
+          </a:p>
+          <a:p>
+            <a:r>
+              <a:t>width: 1px!important;</a:t>
+            </a:r>
+          </a:p>
+          <a:p>
+            <a:r>
+              <a:t>overflow: hidden!important;</a:t>
+            </a:r>
+          </a:p>
+          <a:p>
+            <a:r>
+              <a:t>display:block!important;</a:t>
+            </a:r>
+          </a:p>
+          <a:p>
+            <a:r>
+              <a:t>}</a:t>
+            </a:r>
+          </a:p>
+        </p:txBody>
+      </p:sp>
+      <p:sp>
+        <p:nvSpPr>
+          <p:cNvPr id="4" name="Slide Number Placeholder 3"/>
+          <p:cNvSpPr>
+            <a:spLocks noGrp="1"/>
+          </p:cNvSpPr>
+          <p:nvPr>
+            <p:ph type="sldNum" idx="5" sz="quarter"/>
+          </p:nvPr>
+        </p:nvSpPr>
+        <p:spPr/>
+      </p:sp>
+    </p:spTree>
+  </p:cSld>
+  <p:clrMapOvr>
+    <a:masterClrMapping/>
+  </p:clrMapOvr>
+</p:notes>
+</file>
+
+<file path=ppt/notesSlides/notesSlide12.xml><?xml version="1.0" encoding="utf-8"?>
+<p:notes xmlns:a="http://schemas.openxmlformats.org/drawingml/2006/main" xmlns:p="http://schemas.openxmlformats.org/presentationml/2006/main" xmlns:r="http://schemas.openxmlformats.org/officeDocument/2006/relationships">
+  <p:cSld>
+    <p:spTree>
+      <p:nvGrpSpPr>
+        <p:cNvPr id="1" name=""/>
+        <p:cNvGrpSpPr/>
+        <p:nvPr/>
+      </p:nvGrpSpPr>
+      <p:grpSpPr>
+        <a:xfrm>
+          <a:off x="0" y="0"/>
+          <a:ext cx="0" cy="0"/>
+          <a:chOff x="0" y="0"/>
+          <a:chExt cx="0" cy="0"/>
+        </a:xfrm>
+      </p:grpSpPr>
+      <p:sp>
+        <p:nvSpPr>
+          <p:cNvPr id="2" name="Slide Image Placeholder 1"/>
+          <p:cNvSpPr>
+            <a:spLocks noGrp="1"/>
+          </p:cNvSpPr>
+          <p:nvPr>
+            <p:ph type="sldImg" idx="2"/>
+          </p:nvPr>
+        </p:nvSpPr>
+        <p:spPr/>
+      </p:sp>
+      <p:sp>
+        <p:nvSpPr>
+          <p:cNvPr id="3" name="Notes Placeholder 2"/>
+          <p:cNvSpPr>
+            <a:spLocks noGrp="1"/>
+          </p:cNvSpPr>
+          <p:nvPr>
+            <p:ph type="body" idx="3" sz="quarter"/>
+          </p:nvPr>
+        </p:nvSpPr>
+        <p:spPr/>
+        <p:txBody>
+          <a:bodyPr/>
+          <a:lstStyle/>
+          <a:p>
+            <a:r>
               <a:t>Paper (Oct13_session2_materials.docx): Hand out the take-away cards (pack page 7). Give a minute to fill in “On my desk” on the card, then take two or three examples from the room.</a:t>
             </a:r>
           </a:p>
@@ -1743,7 +1865,7 @@
           <a:lstStyle/>
           <a:p>
             <a:r>
-              <a:t>Paper (Oct13_session2_materials.docx): Hand out the AI handout (pack page 6, one per group).</a:t>
+              <a:t>About 5 minutes, before the four checks. The first two sliders break with-and-without, and the middle one breaks DiD; RDD stays on -900 for both, because neither changes suddenly at 58. The last slider is this method’s one assumption: if something else changes at the cut-off, the jump is not only the programme. Check 3 finds exactly that in the real data: manager age jumps at 58.</a:t>
             </a:r>
           </a:p>
           <a:p/>
@@ -5882,6 +6004,48 @@
 </p:sld>
 </file>
 
+<file path=ppt/slides/slide33.xml><?xml version="1.0" encoding="utf-8"?>
+<p:sld xmlns:a="http://schemas.openxmlformats.org/drawingml/2006/main" xmlns:p="http://schemas.openxmlformats.org/presentationml/2006/main" xmlns:r="http://schemas.openxmlformats.org/officeDocument/2006/relationships">
+  <p:cSld>
+    <p:spTree>
+      <p:nvGrpSpPr>
+        <p:cNvPr id="1" name=""/>
+        <p:cNvGrpSpPr/>
+        <p:nvPr/>
+      </p:nvGrpSpPr>
+      <p:grpSpPr/>
+      <p:pic>
+        <p:nvPicPr>
+          <p:cNvPr id="2" name="Picture 1" descr="s033.jpg"/>
+          <p:cNvPicPr>
+            <a:picLocks noChangeAspect="1"/>
+          </p:cNvPicPr>
+          <p:nvPr/>
+        </p:nvPicPr>
+        <p:blipFill>
+          <a:blip r:embed="rId2"/>
+          <a:stretch>
+            <a:fillRect/>
+          </a:stretch>
+        </p:blipFill>
+        <p:spPr>
+          <a:xfrm>
+            <a:off x="0" y="0"/>
+            <a:ext cx="12192000" cy="6858000"/>
+          </a:xfrm>
+          <a:prstGeom prst="rect">
+            <a:avLst/>
+          </a:prstGeom>
+        </p:spPr>
+      </p:pic>
+    </p:spTree>
+  </p:cSld>
+  <p:clrMapOvr>
+    <a:masterClrMapping/>
+  </p:clrMapOvr>
+</p:sld>
+</file>
+
 <file path=ppt/slides/slide4.xml><?xml version="1.0" encoding="utf-8"?>
 <p:sld xmlns:a="http://schemas.openxmlformats.org/drawingml/2006/main" xmlns:p="http://schemas.openxmlformats.org/presentationml/2006/main" xmlns:r="http://schemas.openxmlformats.org/officeDocument/2006/relationships">
   <p:cSld>
